--- a/downloadables/other/Estate planning/Estate Planning Meeting Slides.pptx
+++ b/downloadables/other/Estate planning/Estate Planning Meeting Slides.pptx
@@ -41,11 +41,11 @@
     <p:sldId id="300" r:id="rId32"/>
     <p:sldId id="301" r:id="rId33"/>
     <p:sldId id="302" r:id="rId34"/>
-    <p:sldId id="333" r:id="rId35"/>
-    <p:sldId id="305" r:id="rId36"/>
-    <p:sldId id="303" r:id="rId37"/>
-    <p:sldId id="308" r:id="rId38"/>
-    <p:sldId id="306" r:id="rId39"/>
+    <p:sldId id="303" r:id="rId35"/>
+    <p:sldId id="308" r:id="rId36"/>
+    <p:sldId id="334" r:id="rId37"/>
+    <p:sldId id="333" r:id="rId38"/>
+    <p:sldId id="305" r:id="rId39"/>
     <p:sldId id="307" r:id="rId40"/>
     <p:sldId id="309" r:id="rId41"/>
     <p:sldId id="310" r:id="rId42"/>
@@ -804,7 +804,7 @@
           <a:p>
             <a:fld id="{7AB30764-2E93-40D4-9536-CEC63B7F7732}" type="datetimeFigureOut">
               <a:rPr lang="en-AU" smtClean="0"/>
-              <a:t>13/12/2024</a:t>
+              <a:t>23/05/2026</a:t>
             </a:fld>
             <a:endParaRPr lang="en-AU"/>
           </a:p>
@@ -1248,6 +1248,13 @@
             <a:schemeClr val="lt1"/>
           </a:fontRef>
         </p:style>
+        <p:txBody>
+          <a:bodyPr/>
+          <a:lstStyle/>
+          <a:p>
+            <a:endParaRPr lang="en-AU"/>
+          </a:p>
+        </p:txBody>
       </p:sp>
       <p:sp>
         <p:nvSpPr>
@@ -1266,7 +1273,7 @@
           <a:p>
             <a:fld id="{726ED139-0480-4198-83E2-68CE0B25BC9B}" type="datetimeFigureOut">
               <a:rPr lang="en-US" dirty="0"/>
-              <a:t>12/13/2024</a:t>
+              <a:t>5/23/2026</a:t>
             </a:fld>
             <a:endParaRPr lang="en-US" dirty="0"/>
           </a:p>
@@ -1432,7 +1439,7 @@
           <a:p>
             <a:fld id="{3A97CE23-3B6A-482C-9BEA-F32A9EB44C40}" type="datetimeFigureOut">
               <a:rPr lang="en-US" dirty="0"/>
-              <a:t>12/13/2024</a:t>
+              <a:t>5/23/2026</a:t>
             </a:fld>
             <a:endParaRPr lang="en-US" dirty="0"/>
           </a:p>
@@ -1648,7 +1655,7 @@
           <a:p>
             <a:fld id="{0639C8FD-9717-4D78-9D01-4CBD0AC8CAE0}" type="datetimeFigureOut">
               <a:rPr lang="en-US" dirty="0"/>
-              <a:t>12/13/2024</a:t>
+              <a:t>5/23/2026</a:t>
             </a:fld>
             <a:endParaRPr lang="en-US" dirty="0"/>
           </a:p>
@@ -1854,7 +1861,7 @@
           <a:p>
             <a:fld id="{B082BD47-5F5E-4508-9DFC-0021F20B392D}" type="datetimeFigureOut">
               <a:rPr lang="en-US" dirty="0"/>
-              <a:t>12/13/2024</a:t>
+              <a:t>5/23/2026</a:t>
             </a:fld>
             <a:endParaRPr lang="en-US" dirty="0"/>
           </a:p>
@@ -2144,7 +2151,7 @@
           <a:p>
             <a:fld id="{07BB23E3-326B-4424-9A50-2CBB9CA4B2E5}" type="datetimeFigureOut">
               <a:rPr lang="en-US" dirty="0"/>
-              <a:t>12/13/2024</a:t>
+              <a:t>5/23/2026</a:t>
             </a:fld>
             <a:endParaRPr lang="en-US" dirty="0"/>
           </a:p>
@@ -2468,7 +2475,7 @@
           <a:p>
             <a:fld id="{FAA09F6F-C437-48B6-80BB-8E50899C06AF}" type="datetimeFigureOut">
               <a:rPr lang="en-US" dirty="0"/>
-              <a:t>12/13/2024</a:t>
+              <a:t>5/23/2026</a:t>
             </a:fld>
             <a:endParaRPr lang="en-US" dirty="0"/>
           </a:p>
@@ -2955,7 +2962,7 @@
           <a:p>
             <a:fld id="{1A776D14-B85F-4865-804C-5734F9C85CDD}" type="datetimeFigureOut">
               <a:rPr lang="en-US" dirty="0"/>
-              <a:t>12/13/2024</a:t>
+              <a:t>5/23/2026</a:t>
             </a:fld>
             <a:endParaRPr lang="en-US" dirty="0"/>
           </a:p>
@@ -3109,7 +3116,7 @@
           <a:p>
             <a:fld id="{A8956C38-6601-4688-9146-5E61D8B04598}" type="datetimeFigureOut">
               <a:rPr lang="en-US" dirty="0"/>
-              <a:t>12/13/2024</a:t>
+              <a:t>5/23/2026</a:t>
             </a:fld>
             <a:endParaRPr lang="en-US" dirty="0"/>
           </a:p>
@@ -3240,7 +3247,7 @@
           <a:p>
             <a:fld id="{3046061E-CDAE-49E3-92CB-288B639C3B6F}" type="datetimeFigureOut">
               <a:rPr lang="en-US" dirty="0"/>
-              <a:t>12/13/2024</a:t>
+              <a:t>5/23/2026</a:t>
             </a:fld>
             <a:endParaRPr lang="en-US" dirty="0"/>
           </a:p>
@@ -3563,7 +3570,7 @@
           <a:p>
             <a:fld id="{A35E9851-4767-4B63-B36B-F772D06043F2}" type="datetimeFigureOut">
               <a:rPr lang="en-US" dirty="0"/>
-              <a:t>12/13/2024</a:t>
+              <a:t>5/23/2026</a:t>
             </a:fld>
             <a:endParaRPr lang="en-US" dirty="0"/>
           </a:p>
@@ -3873,7 +3880,7 @@
           <a:p>
             <a:fld id="{7309A586-BE94-448D-BAE3-D5D323B9149F}" type="datetimeFigureOut">
               <a:rPr lang="en-US" dirty="0"/>
-              <a:t>12/13/2024</a:t>
+              <a:t>5/23/2026</a:t>
             </a:fld>
             <a:endParaRPr lang="en-US" dirty="0"/>
           </a:p>
@@ -3988,6 +3995,13 @@
             <a:schemeClr val="lt1"/>
           </a:fontRef>
         </p:style>
+        <p:txBody>
+          <a:bodyPr/>
+          <a:lstStyle/>
+          <a:p>
+            <a:endParaRPr lang="en-AU"/>
+          </a:p>
+        </p:txBody>
       </p:sp>
       <p:sp>
         <p:nvSpPr>
@@ -4120,7 +4134,7 @@
           <a:p>
             <a:fld id="{ADDEAF24-54CC-4408-99B3-A70A172EFF44}" type="datetimeFigureOut">
               <a:rPr lang="en-US" dirty="0"/>
-              <a:t>12/13/2024</a:t>
+              <a:t>5/23/2026</a:t>
             </a:fld>
             <a:endParaRPr lang="en-US" dirty="0"/>
           </a:p>
@@ -6804,6 +6818,18 @@
           <a:p>
             <a:r>
               <a:rPr lang="en-AU" dirty="0"/>
+              <a:t>Cyber alert</a:t>
+            </a:r>
+          </a:p>
+          <a:p>
+            <a:r>
+              <a:rPr lang="en-AU" dirty="0"/>
+              <a:t>AML obligations</a:t>
+            </a:r>
+          </a:p>
+          <a:p>
+            <a:r>
+              <a:rPr lang="en-AU" dirty="0"/>
               <a:t>ID documents to sight </a:t>
             </a:r>
           </a:p>
@@ -6811,12 +6837,6 @@
             <a:r>
               <a:rPr lang="en-AU" dirty="0"/>
               <a:t>Full names, correct spelling and pronunciation </a:t>
-            </a:r>
-          </a:p>
-          <a:p>
-            <a:r>
-              <a:rPr lang="en-AU" dirty="0"/>
-              <a:t>Worthwhile details to be aware of</a:t>
             </a:r>
           </a:p>
           <a:p>
@@ -6993,7 +7013,7 @@
             <a:pPr lvl="0"/>
             <a:r>
               <a:rPr lang="en-US" dirty="0"/>
-              <a:t>Pension over $1.9 million?</a:t>
+              <a:t>Transfer balance cap to consider?</a:t>
             </a:r>
           </a:p>
           <a:p>
@@ -7372,7 +7392,7 @@
         </p:spPr>
         <p:txBody>
           <a:bodyPr>
-            <a:normAutofit fontScale="92500" lnSpcReduction="10000"/>
+            <a:normAutofit/>
           </a:bodyPr>
           <a:lstStyle/>
           <a:p>
@@ -7381,14 +7401,7 @@
             </a:pPr>
             <a:r>
               <a:rPr lang="en-US" dirty="0"/>
-              <a:t>Joint tenants (think ‘joined by the hips’)</a:t>
-            </a:r>
-          </a:p>
-          <a:p>
-            <a:pPr lvl="0"/>
-            <a:r>
-              <a:rPr lang="en-US" dirty="0"/>
-              <a:t>Rule of survivorship – each person owns 100% (from succession perspective)</a:t>
+              <a:t>Joint tenants Rule of survivorship </a:t>
             </a:r>
           </a:p>
           <a:p>
@@ -8972,7 +8985,7 @@
           <a:p>
             <a:r>
               <a:rPr lang="en-US" dirty="0"/>
-              <a:t>Lasts for 80 years in all Australian jurisdictions other than South Australia</a:t>
+              <a:t>Lasts for 80 years in all Australian jurisdictions other than South Australia (unlimited) and Queensland (125 years)</a:t>
             </a:r>
           </a:p>
           <a:p>
@@ -9019,13 +9032,7 @@
   <p:cSld>
     <p:spTree>
       <p:nvGrpSpPr>
-        <p:cNvPr id="1" name="">
-          <a:extLst>
-            <a:ext uri="{FF2B5EF4-FFF2-40B4-BE49-F238E27FC236}">
-              <a16:creationId xmlns:a16="http://schemas.microsoft.com/office/drawing/2014/main" id="{4BCCA249-7BFA-F3EC-F032-342575930A95}"/>
-            </a:ext>
-          </a:extLst>
-        </p:cNvPr>
+        <p:cNvPr id="1" name=""/>
         <p:cNvGrpSpPr/>
         <p:nvPr/>
       </p:nvGrpSpPr>
@@ -9042,7 +9049,7 @@
           <p:cNvPr id="2" name="Title 1">
             <a:extLst>
               <a:ext uri="{FF2B5EF4-FFF2-40B4-BE49-F238E27FC236}">
-                <a16:creationId xmlns:a16="http://schemas.microsoft.com/office/drawing/2014/main" id="{C2DA0CAB-773C-24CB-9180-0ABB803C4D66}"/>
+                <a16:creationId xmlns:a16="http://schemas.microsoft.com/office/drawing/2014/main" id="{7F5CD355-0B6A-4ED3-93F5-802B5D5D5AE6}"/>
               </a:ext>
             </a:extLst>
           </p:cNvPr>
@@ -9060,7 +9067,7 @@
           <a:p>
             <a:r>
               <a:rPr lang="en-AU" dirty="0"/>
-              <a:t>Testamentary trust and minor children</a:t>
+              <a:t>Protection of testamentary trusts</a:t>
             </a:r>
           </a:p>
         </p:txBody>
@@ -9070,7 +9077,7 @@
           <p:cNvPr id="3" name="Content Placeholder 2">
             <a:extLst>
               <a:ext uri="{FF2B5EF4-FFF2-40B4-BE49-F238E27FC236}">
-                <a16:creationId xmlns:a16="http://schemas.microsoft.com/office/drawing/2014/main" id="{3775F0C0-1651-F7F2-C1C5-0509452E4FCA}"/>
+                <a16:creationId xmlns:a16="http://schemas.microsoft.com/office/drawing/2014/main" id="{8F87A3BB-4F12-4FEB-B7D2-BA2CC372E9C6}"/>
               </a:ext>
             </a:extLst>
           </p:cNvPr>
@@ -9096,94 +9103,47 @@
             <a:pPr lvl="0"/>
             <a:r>
               <a:rPr lang="en-US" dirty="0"/>
-              <a:t>Trust established during lifetime – distributions to minor children:</a:t>
-            </a:r>
-          </a:p>
-          <a:p>
-            <a:pPr lvl="1"/>
-            <a:r>
-              <a:rPr lang="en-US" dirty="0"/>
-              <a:t>$0 - $416 – nil</a:t>
-            </a:r>
-          </a:p>
-          <a:p>
-            <a:pPr lvl="1"/>
-            <a:r>
-              <a:rPr lang="en-US" dirty="0"/>
-              <a:t>$417 - $1,307 – nil plus 66% of excess over $416</a:t>
-            </a:r>
-          </a:p>
-          <a:p>
-            <a:pPr lvl="1"/>
-            <a:r>
-              <a:rPr lang="en-US" dirty="0"/>
-              <a:t>Over $1,307 – 45% of the total amount of income that is not excepted income</a:t>
-            </a:r>
-          </a:p>
-          <a:p>
-            <a:r>
-              <a:rPr lang="en-US" dirty="0"/>
-              <a:t>Excepted income includes ‘</a:t>
+              <a:t>At law, the greater the divide between the trustee and beneficiary, the stronger the protection</a:t>
+            </a:r>
+          </a:p>
+          <a:p>
+            <a:pPr lvl="0"/>
+            <a:r>
+              <a:rPr lang="en-US" dirty="0"/>
+              <a:t>Impossible to structure correctly without predicting the future</a:t>
+            </a:r>
+          </a:p>
+          <a:p>
+            <a:pPr lvl="0"/>
+            <a:r>
+              <a:rPr lang="en-US" dirty="0"/>
+              <a:t>At least including an initial set up in Will allows recipients to restructure at the appropriate juncture</a:t>
+            </a:r>
+          </a:p>
+          <a:p>
+            <a:pPr lvl="0"/>
+            <a:r>
+              <a:rPr lang="en-US" dirty="0"/>
+              <a:t>If there is a known threat, then we can structure the testamentary trust from the onset</a:t>
+            </a:r>
+          </a:p>
+          <a:p>
+            <a:pPr lvl="0"/>
+            <a:r>
+              <a:rPr lang="en-US" dirty="0"/>
+              <a:t>Again, the less control beneficiaries have, the greater the protection</a:t>
+            </a:r>
+          </a:p>
+          <a:p>
+            <a:pPr lvl="0"/>
+            <a:r>
+              <a:rPr lang="en-US" dirty="0"/>
+              <a:t>Family law case - </a:t>
             </a:r>
             <a:r>
               <a:rPr lang="en-US" i="1" dirty="0"/>
-              <a:t>income…of a trust estate that resulted from: (</a:t>
-            </a:r>
-            <a:r>
-              <a:rPr lang="en-US" i="1" dirty="0" err="1"/>
-              <a:t>i</a:t>
-            </a:r>
-            <a:r>
-              <a:rPr lang="en-US" i="1" dirty="0"/>
-              <a:t>) a will)’ – </a:t>
-            </a:r>
-            <a:r>
-              <a:rPr lang="en-US" dirty="0"/>
-              <a:t>section 102 AG 1936 Tax Act</a:t>
-            </a:r>
-          </a:p>
-          <a:p>
-            <a:r>
-              <a:rPr lang="en-US" dirty="0"/>
-              <a:t>Normal tax rate:</a:t>
-            </a:r>
-          </a:p>
-          <a:p>
-            <a:pPr lvl="1"/>
-            <a:r>
-              <a:rPr lang="en-US" dirty="0"/>
-              <a:t>$0 - $18,200 – nil</a:t>
-            </a:r>
-          </a:p>
-          <a:p>
-            <a:pPr lvl="1"/>
-            <a:r>
-              <a:rPr lang="en-US" dirty="0"/>
-              <a:t>$18,201 - $45,000 – 16% above $18,200</a:t>
-            </a:r>
-          </a:p>
-          <a:p>
-            <a:pPr lvl="1"/>
-            <a:r>
-              <a:rPr lang="en-US" dirty="0"/>
-              <a:t>$45,001 - $135,000 - $4,288 plus 30% above $45,000</a:t>
-            </a:r>
-          </a:p>
-          <a:p>
-            <a:pPr lvl="1"/>
-            <a:r>
-              <a:rPr lang="en-US" dirty="0"/>
-              <a:t>$135,001 - $190,000 - $31,288 plus 37% above $135,000</a:t>
-            </a:r>
-          </a:p>
-          <a:p>
-            <a:pPr lvl="1"/>
-            <a:r>
-              <a:rPr lang="en-US" dirty="0"/>
-              <a:t>$190,001 and above - $51,648 plus 45% above $190,000</a:t>
-            </a:r>
-          </a:p>
-          <a:p>
+              <a:t>Bernard</a:t>
+            </a:r>
             <a:endParaRPr lang="en-US" dirty="0"/>
           </a:p>
           <a:p>
@@ -9194,7 +9154,7 @@
     </p:spTree>
     <p:extLst>
       <p:ext uri="{BB962C8B-B14F-4D97-AF65-F5344CB8AC3E}">
-        <p14:creationId xmlns:p14="http://schemas.microsoft.com/office/powerpoint/2010/main" val="782846654"/>
+        <p14:creationId xmlns:p14="http://schemas.microsoft.com/office/powerpoint/2010/main" val="651647637"/>
       </p:ext>
     </p:extLst>
   </p:cSld>
@@ -9244,201 +9204,6 @@
           <a:p>
             <a:r>
               <a:rPr lang="en-AU" dirty="0"/>
-              <a:t>Testamentary trusts</a:t>
-            </a:r>
-          </a:p>
-        </p:txBody>
-      </p:sp>
-    </p:spTree>
-    <p:extLst>
-      <p:ext uri="{BB962C8B-B14F-4D97-AF65-F5344CB8AC3E}">
-        <p14:creationId xmlns:p14="http://schemas.microsoft.com/office/powerpoint/2010/main" val="3922821135"/>
-      </p:ext>
-    </p:extLst>
-  </p:cSld>
-  <p:clrMapOvr>
-    <a:masterClrMapping/>
-  </p:clrMapOvr>
-</p:sld>
-</file>
-
-<file path=ppt/slides/slide36.xml><?xml version="1.0" encoding="utf-8"?>
-<p:sld xmlns:a="http://schemas.openxmlformats.org/drawingml/2006/main" xmlns:r="http://schemas.openxmlformats.org/officeDocument/2006/relationships" xmlns:p="http://schemas.openxmlformats.org/presentationml/2006/main">
-  <p:cSld>
-    <p:spTree>
-      <p:nvGrpSpPr>
-        <p:cNvPr id="1" name=""/>
-        <p:cNvGrpSpPr/>
-        <p:nvPr/>
-      </p:nvGrpSpPr>
-      <p:grpSpPr>
-        <a:xfrm>
-          <a:off x="0" y="0"/>
-          <a:ext cx="0" cy="0"/>
-          <a:chOff x="0" y="0"/>
-          <a:chExt cx="0" cy="0"/>
-        </a:xfrm>
-      </p:grpSpPr>
-      <p:sp>
-        <p:nvSpPr>
-          <p:cNvPr id="2" name="Title 1">
-            <a:extLst>
-              <a:ext uri="{FF2B5EF4-FFF2-40B4-BE49-F238E27FC236}">
-                <a16:creationId xmlns:a16="http://schemas.microsoft.com/office/drawing/2014/main" id="{7F5CD355-0B6A-4ED3-93F5-802B5D5D5AE6}"/>
-              </a:ext>
-            </a:extLst>
-          </p:cNvPr>
-          <p:cNvSpPr>
-            <a:spLocks noGrp="1"/>
-          </p:cNvSpPr>
-          <p:nvPr>
-            <p:ph type="title"/>
-          </p:nvPr>
-        </p:nvSpPr>
-        <p:spPr/>
-        <p:txBody>
-          <a:bodyPr/>
-          <a:lstStyle/>
-          <a:p>
-            <a:r>
-              <a:rPr lang="en-AU" dirty="0"/>
-              <a:t>Protection of testamentary trusts</a:t>
-            </a:r>
-          </a:p>
-        </p:txBody>
-      </p:sp>
-      <p:sp>
-        <p:nvSpPr>
-          <p:cNvPr id="3" name="Content Placeholder 2">
-            <a:extLst>
-              <a:ext uri="{FF2B5EF4-FFF2-40B4-BE49-F238E27FC236}">
-                <a16:creationId xmlns:a16="http://schemas.microsoft.com/office/drawing/2014/main" id="{8F87A3BB-4F12-4FEB-B7D2-BA2CC372E9C6}"/>
-              </a:ext>
-            </a:extLst>
-          </p:cNvPr>
-          <p:cNvSpPr>
-            <a:spLocks noGrp="1"/>
-          </p:cNvSpPr>
-          <p:nvPr>
-            <p:ph idx="1"/>
-          </p:nvPr>
-        </p:nvSpPr>
-        <p:spPr>
-          <a:xfrm>
-            <a:off x="1261872" y="1828800"/>
-            <a:ext cx="8595360" cy="4735002"/>
-          </a:xfrm>
-        </p:spPr>
-        <p:txBody>
-          <a:bodyPr>
-            <a:normAutofit/>
-          </a:bodyPr>
-          <a:lstStyle/>
-          <a:p>
-            <a:pPr lvl="0"/>
-            <a:r>
-              <a:rPr lang="en-US" dirty="0"/>
-              <a:t>At law, the greater the divide between the trustee and beneficiary, the stronger the protection</a:t>
-            </a:r>
-          </a:p>
-          <a:p>
-            <a:pPr lvl="0"/>
-            <a:r>
-              <a:rPr lang="en-US" dirty="0"/>
-              <a:t>Impossible to structure correctly without predicting the future</a:t>
-            </a:r>
-          </a:p>
-          <a:p>
-            <a:pPr lvl="0"/>
-            <a:r>
-              <a:rPr lang="en-US" dirty="0"/>
-              <a:t>At least including an initial set up in Will allows recipients to restructure at the appropriate juncture</a:t>
-            </a:r>
-          </a:p>
-          <a:p>
-            <a:pPr lvl="0"/>
-            <a:r>
-              <a:rPr lang="en-US" dirty="0"/>
-              <a:t>If there is a known threat, then we can structure the testamentary trust from the onset</a:t>
-            </a:r>
-          </a:p>
-          <a:p>
-            <a:pPr lvl="0"/>
-            <a:r>
-              <a:rPr lang="en-US" dirty="0"/>
-              <a:t>Again, the less control beneficiaries have, the greater the protection</a:t>
-            </a:r>
-          </a:p>
-          <a:p>
-            <a:pPr lvl="0"/>
-            <a:r>
-              <a:rPr lang="en-US" dirty="0"/>
-              <a:t>Family law case - </a:t>
-            </a:r>
-            <a:r>
-              <a:rPr lang="en-US" i="1" dirty="0"/>
-              <a:t>Bernard</a:t>
-            </a:r>
-            <a:endParaRPr lang="en-US" dirty="0"/>
-          </a:p>
-          <a:p>
-            <a:endParaRPr lang="en-AU" dirty="0"/>
-          </a:p>
-        </p:txBody>
-      </p:sp>
-    </p:spTree>
-    <p:extLst>
-      <p:ext uri="{BB962C8B-B14F-4D97-AF65-F5344CB8AC3E}">
-        <p14:creationId xmlns:p14="http://schemas.microsoft.com/office/powerpoint/2010/main" val="651647637"/>
-      </p:ext>
-    </p:extLst>
-  </p:cSld>
-  <p:clrMapOvr>
-    <a:masterClrMapping/>
-  </p:clrMapOvr>
-</p:sld>
-</file>
-
-<file path=ppt/slides/slide37.xml><?xml version="1.0" encoding="utf-8"?>
-<p:sld xmlns:a="http://schemas.openxmlformats.org/drawingml/2006/main" xmlns:r="http://schemas.openxmlformats.org/officeDocument/2006/relationships" xmlns:p="http://schemas.openxmlformats.org/presentationml/2006/main">
-  <p:cSld>
-    <p:spTree>
-      <p:nvGrpSpPr>
-        <p:cNvPr id="1" name=""/>
-        <p:cNvGrpSpPr/>
-        <p:nvPr/>
-      </p:nvGrpSpPr>
-      <p:grpSpPr>
-        <a:xfrm>
-          <a:off x="0" y="0"/>
-          <a:ext cx="0" cy="0"/>
-          <a:chOff x="0" y="0"/>
-          <a:chExt cx="0" cy="0"/>
-        </a:xfrm>
-      </p:grpSpPr>
-      <p:sp>
-        <p:nvSpPr>
-          <p:cNvPr id="2" name="Title 1">
-            <a:extLst>
-              <a:ext uri="{FF2B5EF4-FFF2-40B4-BE49-F238E27FC236}">
-                <a16:creationId xmlns:a16="http://schemas.microsoft.com/office/drawing/2014/main" id="{7F5CD355-0B6A-4ED3-93F5-802B5D5D5AE6}"/>
-              </a:ext>
-            </a:extLst>
-          </p:cNvPr>
-          <p:cNvSpPr>
-            <a:spLocks noGrp="1"/>
-          </p:cNvSpPr>
-          <p:nvPr>
-            <p:ph type="title"/>
-          </p:nvPr>
-        </p:nvSpPr>
-        <p:spPr/>
-        <p:txBody>
-          <a:bodyPr/>
-          <a:lstStyle/>
-          <a:p>
-            <a:r>
-              <a:rPr lang="en-AU" dirty="0"/>
               <a:t>Benefits and disadvantages</a:t>
             </a:r>
           </a:p>
@@ -9459,14 +9224,14 @@
           <p:nvPr>
             <p:extLst>
               <p:ext uri="{D42A27DB-BD31-4B8C-83A1-F6EECF244321}">
-                <p14:modId xmlns:p14="http://schemas.microsoft.com/office/powerpoint/2010/main" val="1725889365"/>
+                <p14:modId xmlns:p14="http://schemas.microsoft.com/office/powerpoint/2010/main" val="73865146"/>
               </p:ext>
             </p:extLst>
           </p:nvPr>
         </p:nvGraphicFramePr>
         <p:xfrm>
           <a:off x="1200326" y="2303584"/>
-          <a:ext cx="9561459" cy="3193389"/>
+          <a:ext cx="9561459" cy="2436489"/>
         </p:xfrm>
         <a:graphic>
           <a:graphicData uri="http://schemas.openxmlformats.org/drawingml/2006/table">
@@ -9847,7 +9612,7 @@
                           <a:cs typeface="Tinos"/>
                           <a:sym typeface="Tinos"/>
                         </a:rPr>
-                        <a:t>Ability to distribute to a range of people (including minors at adult tax rates)</a:t>
+                        <a:t>Ability to distribute to a range of people </a:t>
                       </a:r>
                       <a:endParaRPr sz="1400" b="0" dirty="0">
                         <a:solidFill>
@@ -10030,117 +9795,6 @@
                   </a:ext>
                 </a:extLst>
               </a:tr>
-              <a:tr h="370840">
-                <a:tc>
-                  <a:txBody>
-                    <a:bodyPr/>
-                    <a:lstStyle/>
-                    <a:p>
-                      <a:pPr marL="0" lvl="0" indent="0" algn="l" rtl="0">
-                        <a:spcBef>
-                          <a:spcPts val="0"/>
-                        </a:spcBef>
-                        <a:spcAft>
-                          <a:spcPts val="0"/>
-                        </a:spcAft>
-                        <a:buNone/>
-                      </a:pPr>
-                      <a:endParaRPr sz="1400" b="0" dirty="0">
-                        <a:solidFill>
-                          <a:srgbClr val="272A35"/>
-                        </a:solidFill>
-                        <a:latin typeface="+mj-lt"/>
-                        <a:ea typeface="Tinos"/>
-                        <a:cs typeface="Tinos"/>
-                        <a:sym typeface="Tinos"/>
-                      </a:endParaRPr>
-                    </a:p>
-                  </a:txBody>
-                  <a:tcPr marL="91425" marR="91425" marT="68575" marB="68575" anchor="ctr"/>
-                </a:tc>
-                <a:tc>
-                  <a:txBody>
-                    <a:bodyPr/>
-                    <a:lstStyle/>
-                    <a:p>
-                      <a:pPr marL="0" lvl="0" indent="0" algn="ctr" rtl="0">
-                        <a:spcBef>
-                          <a:spcPts val="0"/>
-                        </a:spcBef>
-                        <a:spcAft>
-                          <a:spcPts val="0"/>
-                        </a:spcAft>
-                        <a:buNone/>
-                      </a:pPr>
-                      <a:r>
-                        <a:rPr lang="en-AU" sz="1400" b="0" dirty="0">
-                          <a:solidFill>
-                            <a:srgbClr val="272A35"/>
-                          </a:solidFill>
-                          <a:latin typeface="+mj-lt"/>
-                          <a:ea typeface="Tinos"/>
-                          <a:cs typeface="Tinos"/>
-                          <a:sym typeface="Tinos"/>
-                        </a:rPr>
-                        <a:t>People who may be sued do not receive assets in their name</a:t>
-                      </a:r>
-                      <a:endParaRPr sz="1400" b="0" dirty="0">
-                        <a:solidFill>
-                          <a:srgbClr val="272A35"/>
-                        </a:solidFill>
-                        <a:latin typeface="+mj-lt"/>
-                        <a:ea typeface="Tinos"/>
-                        <a:cs typeface="Tinos"/>
-                        <a:sym typeface="Tinos"/>
-                      </a:endParaRPr>
-                    </a:p>
-                  </a:txBody>
-                  <a:tcPr marL="91425" marR="91425" marT="68575" marB="68575" anchor="ctr"/>
-                </a:tc>
-                <a:tc>
-                  <a:txBody>
-                    <a:bodyPr/>
-                    <a:lstStyle/>
-                    <a:p>
-                      <a:pPr marL="0" marR="0" lvl="0" indent="0" algn="ctr" defTabSz="342900" rtl="0" eaLnBrk="1" fontAlgn="auto" latinLnBrk="0" hangingPunct="1">
-                        <a:lnSpc>
-                          <a:spcPct val="100000"/>
-                        </a:lnSpc>
-                        <a:spcBef>
-                          <a:spcPts val="0"/>
-                        </a:spcBef>
-                        <a:spcAft>
-                          <a:spcPts val="0"/>
-                        </a:spcAft>
-                        <a:buClrTx/>
-                        <a:buSzTx/>
-                        <a:buFontTx/>
-                        <a:buNone/>
-                        <a:tabLst/>
-                        <a:defRPr/>
-                      </a:pPr>
-                      <a:r>
-                        <a:rPr lang="en-GB" sz="1400" b="0" kern="1200" dirty="0">
-                          <a:solidFill>
-                            <a:srgbClr val="272A35"/>
-                          </a:solidFill>
-                          <a:latin typeface="+mj-lt"/>
-                          <a:ea typeface="Tinos"/>
-                          <a:cs typeface="Tinos"/>
-                          <a:sym typeface="Tinos"/>
-                        </a:rPr>
-                        <a:t>Concept can be difficult to understand</a:t>
-                      </a:r>
-                    </a:p>
-                  </a:txBody>
-                  <a:tcPr marL="91425" marR="91425" marT="68575" marB="68575" anchor="ctr"/>
-                </a:tc>
-                <a:extLst>
-                  <a:ext uri="{0D108BD9-81ED-4DB2-BD59-A6C34878D82A}">
-                    <a16:rowId xmlns:a16="http://schemas.microsoft.com/office/drawing/2014/main" val="1264603706"/>
-                  </a:ext>
-                </a:extLst>
-              </a:tr>
             </a:tbl>
           </a:graphicData>
         </a:graphic>
@@ -10149,6 +9803,327 @@
     <p:extLst>
       <p:ext uri="{BB962C8B-B14F-4D97-AF65-F5344CB8AC3E}">
         <p14:creationId xmlns:p14="http://schemas.microsoft.com/office/powerpoint/2010/main" val="2447780650"/>
+      </p:ext>
+    </p:extLst>
+  </p:cSld>
+  <p:clrMapOvr>
+    <a:masterClrMapping/>
+  </p:clrMapOvr>
+</p:sld>
+</file>
+
+<file path=ppt/slides/slide36.xml><?xml version="1.0" encoding="utf-8"?>
+<p:sld xmlns:a="http://schemas.openxmlformats.org/drawingml/2006/main" xmlns:r="http://schemas.openxmlformats.org/officeDocument/2006/relationships" xmlns:p="http://schemas.openxmlformats.org/presentationml/2006/main">
+  <p:cSld>
+    <p:spTree>
+      <p:nvGrpSpPr>
+        <p:cNvPr id="1" name="">
+          <a:extLst>
+            <a:ext uri="{FF2B5EF4-FFF2-40B4-BE49-F238E27FC236}">
+              <a16:creationId xmlns:a16="http://schemas.microsoft.com/office/drawing/2014/main" id="{5BAE6546-3BF0-0112-020D-513985F9F242}"/>
+            </a:ext>
+          </a:extLst>
+        </p:cNvPr>
+        <p:cNvGrpSpPr/>
+        <p:nvPr/>
+      </p:nvGrpSpPr>
+      <p:grpSpPr>
+        <a:xfrm>
+          <a:off x="0" y="0"/>
+          <a:ext cx="0" cy="0"/>
+          <a:chOff x="0" y="0"/>
+          <a:chExt cx="0" cy="0"/>
+        </a:xfrm>
+      </p:grpSpPr>
+      <p:sp>
+        <p:nvSpPr>
+          <p:cNvPr id="2" name="Title 1">
+            <a:extLst>
+              <a:ext uri="{FF2B5EF4-FFF2-40B4-BE49-F238E27FC236}">
+                <a16:creationId xmlns:a16="http://schemas.microsoft.com/office/drawing/2014/main" id="{777F8B92-CE98-61F4-8F35-1BC5A3EF8F97}"/>
+              </a:ext>
+            </a:extLst>
+          </p:cNvPr>
+          <p:cNvSpPr>
+            <a:spLocks noGrp="1"/>
+          </p:cNvSpPr>
+          <p:nvPr>
+            <p:ph type="title"/>
+          </p:nvPr>
+        </p:nvSpPr>
+        <p:spPr/>
+        <p:txBody>
+          <a:bodyPr/>
+          <a:lstStyle/>
+          <a:p>
+            <a:r>
+              <a:rPr lang="en-AU" dirty="0"/>
+              <a:t>Testamentary trust and tax planning</a:t>
+            </a:r>
+          </a:p>
+        </p:txBody>
+      </p:sp>
+      <p:sp>
+        <p:nvSpPr>
+          <p:cNvPr id="3" name="Content Placeholder 2">
+            <a:extLst>
+              <a:ext uri="{FF2B5EF4-FFF2-40B4-BE49-F238E27FC236}">
+                <a16:creationId xmlns:a16="http://schemas.microsoft.com/office/drawing/2014/main" id="{E04E8BF2-CCC0-C49B-DC23-0E1343F28029}"/>
+              </a:ext>
+            </a:extLst>
+          </p:cNvPr>
+          <p:cNvSpPr>
+            <a:spLocks noGrp="1"/>
+          </p:cNvSpPr>
+          <p:nvPr>
+            <p:ph idx="1"/>
+          </p:nvPr>
+        </p:nvSpPr>
+        <p:spPr>
+          <a:xfrm>
+            <a:off x="1261872" y="1828800"/>
+            <a:ext cx="8595360" cy="4735002"/>
+          </a:xfrm>
+        </p:spPr>
+        <p:txBody>
+          <a:bodyPr>
+            <a:normAutofit/>
+          </a:bodyPr>
+          <a:lstStyle/>
+          <a:p>
+            <a:pPr lvl="0"/>
+            <a:r>
+              <a:rPr lang="en-US" dirty="0"/>
+              <a:t>Current rules uncertain (2026 Budget announcement contains insufficient information but leaves exceptions)</a:t>
+            </a:r>
+          </a:p>
+          <a:p>
+            <a:pPr lvl="0"/>
+            <a:r>
+              <a:rPr lang="en-US" dirty="0"/>
+              <a:t>Best case scenario per following slide</a:t>
+            </a:r>
+          </a:p>
+          <a:p>
+            <a:pPr lvl="0"/>
+            <a:r>
+              <a:rPr lang="en-US" dirty="0"/>
+              <a:t>Worst case scenario – 30% tax on trust distributions</a:t>
+            </a:r>
+          </a:p>
+          <a:p>
+            <a:pPr lvl="0"/>
+            <a:r>
+              <a:rPr lang="en-US" dirty="0"/>
+              <a:t>Testamentary trust still allows passing of control and offers asset protection</a:t>
+            </a:r>
+          </a:p>
+          <a:p>
+            <a:pPr lvl="0"/>
+            <a:endParaRPr lang="en-US" dirty="0"/>
+          </a:p>
+          <a:p>
+            <a:endParaRPr lang="en-US" dirty="0"/>
+          </a:p>
+          <a:p>
+            <a:endParaRPr lang="en-AU" dirty="0"/>
+          </a:p>
+        </p:txBody>
+      </p:sp>
+    </p:spTree>
+    <p:extLst>
+      <p:ext uri="{BB962C8B-B14F-4D97-AF65-F5344CB8AC3E}">
+        <p14:creationId xmlns:p14="http://schemas.microsoft.com/office/powerpoint/2010/main" val="3795976907"/>
+      </p:ext>
+    </p:extLst>
+  </p:cSld>
+  <p:clrMapOvr>
+    <a:masterClrMapping/>
+  </p:clrMapOvr>
+</p:sld>
+</file>
+
+<file path=ppt/slides/slide37.xml><?xml version="1.0" encoding="utf-8"?>
+<p:sld xmlns:a="http://schemas.openxmlformats.org/drawingml/2006/main" xmlns:r="http://schemas.openxmlformats.org/officeDocument/2006/relationships" xmlns:p="http://schemas.openxmlformats.org/presentationml/2006/main">
+  <p:cSld>
+    <p:spTree>
+      <p:nvGrpSpPr>
+        <p:cNvPr id="1" name="">
+          <a:extLst>
+            <a:ext uri="{FF2B5EF4-FFF2-40B4-BE49-F238E27FC236}">
+              <a16:creationId xmlns:a16="http://schemas.microsoft.com/office/drawing/2014/main" id="{4BCCA249-7BFA-F3EC-F032-342575930A95}"/>
+            </a:ext>
+          </a:extLst>
+        </p:cNvPr>
+        <p:cNvGrpSpPr/>
+        <p:nvPr/>
+      </p:nvGrpSpPr>
+      <p:grpSpPr>
+        <a:xfrm>
+          <a:off x="0" y="0"/>
+          <a:ext cx="0" cy="0"/>
+          <a:chOff x="0" y="0"/>
+          <a:chExt cx="0" cy="0"/>
+        </a:xfrm>
+      </p:grpSpPr>
+      <p:sp>
+        <p:nvSpPr>
+          <p:cNvPr id="2" name="Title 1">
+            <a:extLst>
+              <a:ext uri="{FF2B5EF4-FFF2-40B4-BE49-F238E27FC236}">
+                <a16:creationId xmlns:a16="http://schemas.microsoft.com/office/drawing/2014/main" id="{C2DA0CAB-773C-24CB-9180-0ABB803C4D66}"/>
+              </a:ext>
+            </a:extLst>
+          </p:cNvPr>
+          <p:cNvSpPr>
+            <a:spLocks noGrp="1"/>
+          </p:cNvSpPr>
+          <p:nvPr>
+            <p:ph type="title"/>
+          </p:nvPr>
+        </p:nvSpPr>
+        <p:spPr/>
+        <p:txBody>
+          <a:bodyPr/>
+          <a:lstStyle/>
+          <a:p>
+            <a:r>
+              <a:rPr lang="en-AU" dirty="0"/>
+              <a:t>Testamentary trust and minor children</a:t>
+            </a:r>
+          </a:p>
+        </p:txBody>
+      </p:sp>
+      <p:sp>
+        <p:nvSpPr>
+          <p:cNvPr id="3" name="Content Placeholder 2">
+            <a:extLst>
+              <a:ext uri="{FF2B5EF4-FFF2-40B4-BE49-F238E27FC236}">
+                <a16:creationId xmlns:a16="http://schemas.microsoft.com/office/drawing/2014/main" id="{3775F0C0-1651-F7F2-C1C5-0509452E4FCA}"/>
+              </a:ext>
+            </a:extLst>
+          </p:cNvPr>
+          <p:cNvSpPr>
+            <a:spLocks noGrp="1"/>
+          </p:cNvSpPr>
+          <p:nvPr>
+            <p:ph idx="1"/>
+          </p:nvPr>
+        </p:nvSpPr>
+        <p:spPr>
+          <a:xfrm>
+            <a:off x="1261872" y="1828800"/>
+            <a:ext cx="8595360" cy="4735002"/>
+          </a:xfrm>
+        </p:spPr>
+        <p:txBody>
+          <a:bodyPr>
+            <a:normAutofit/>
+          </a:bodyPr>
+          <a:lstStyle/>
+          <a:p>
+            <a:pPr lvl="0"/>
+            <a:r>
+              <a:rPr lang="en-US" dirty="0"/>
+              <a:t>Trust established during lifetime – distributions to minor children:</a:t>
+            </a:r>
+          </a:p>
+          <a:p>
+            <a:pPr lvl="1"/>
+            <a:r>
+              <a:rPr lang="en-US" dirty="0"/>
+              <a:t>$0 - $416 – nil</a:t>
+            </a:r>
+          </a:p>
+          <a:p>
+            <a:pPr lvl="1"/>
+            <a:r>
+              <a:rPr lang="en-US" dirty="0"/>
+              <a:t>$417 - $1,307 – nil plus 66% of excess over $416</a:t>
+            </a:r>
+          </a:p>
+          <a:p>
+            <a:pPr lvl="1"/>
+            <a:r>
+              <a:rPr lang="en-US" dirty="0"/>
+              <a:t>Over $1,307 – 45% of the total amount of income that is not excepted income</a:t>
+            </a:r>
+          </a:p>
+          <a:p>
+            <a:r>
+              <a:rPr lang="en-US" dirty="0"/>
+              <a:t>Excepted income includes ‘</a:t>
+            </a:r>
+            <a:r>
+              <a:rPr lang="en-US" i="1" dirty="0"/>
+              <a:t>income…of a trust estate that resulted from: (</a:t>
+            </a:r>
+            <a:r>
+              <a:rPr lang="en-US" i="1" dirty="0" err="1"/>
+              <a:t>i</a:t>
+            </a:r>
+            <a:r>
+              <a:rPr lang="en-US" i="1" dirty="0"/>
+              <a:t>) a will)’ – </a:t>
+            </a:r>
+            <a:r>
+              <a:rPr lang="en-US" dirty="0"/>
+              <a:t>section 102 AG 1936 Tax Act</a:t>
+            </a:r>
+          </a:p>
+          <a:p>
+            <a:r>
+              <a:rPr lang="en-US" dirty="0"/>
+              <a:t>Normal tax rate:</a:t>
+            </a:r>
+          </a:p>
+          <a:p>
+            <a:pPr lvl="1"/>
+            <a:r>
+              <a:rPr lang="en-US" dirty="0"/>
+              <a:t>$0 - $18,200 – nil</a:t>
+            </a:r>
+          </a:p>
+          <a:p>
+            <a:pPr lvl="1"/>
+            <a:r>
+              <a:rPr lang="en-US" dirty="0"/>
+              <a:t>$18,201 - $45,000 – 16% above $18,200</a:t>
+            </a:r>
+          </a:p>
+          <a:p>
+            <a:pPr lvl="1"/>
+            <a:r>
+              <a:rPr lang="en-US" dirty="0"/>
+              <a:t>$45,001 - $135,000 - $4,288 plus 30% above $45,000</a:t>
+            </a:r>
+          </a:p>
+          <a:p>
+            <a:pPr lvl="1"/>
+            <a:r>
+              <a:rPr lang="en-US" dirty="0"/>
+              <a:t>$135,001 - $190,000 - $31,288 plus 37% above $135,000</a:t>
+            </a:r>
+          </a:p>
+          <a:p>
+            <a:pPr lvl="1"/>
+            <a:r>
+              <a:rPr lang="en-US" dirty="0"/>
+              <a:t>$190,001 and above - $51,648 plus 45% above $190,000</a:t>
+            </a:r>
+          </a:p>
+          <a:p>
+            <a:endParaRPr lang="en-US" dirty="0"/>
+          </a:p>
+          <a:p>
+            <a:endParaRPr lang="en-AU" dirty="0"/>
+          </a:p>
+        </p:txBody>
+      </p:sp>
+    </p:spTree>
+    <p:extLst>
+      <p:ext uri="{BB962C8B-B14F-4D97-AF65-F5344CB8AC3E}">
+        <p14:creationId xmlns:p14="http://schemas.microsoft.com/office/powerpoint/2010/main" val="782846654"/>
       </p:ext>
     </p:extLst>
   </p:cSld>
@@ -10198,345 +10173,15 @@
           <a:p>
             <a:r>
               <a:rPr lang="en-AU" dirty="0"/>
-              <a:t>When to have a testamentary trust?</a:t>
-            </a:r>
-          </a:p>
-        </p:txBody>
-      </p:sp>
-      <p:graphicFrame>
-        <p:nvGraphicFramePr>
-          <p:cNvPr id="6" name="Table 6">
-            <a:extLst>
-              <a:ext uri="{FF2B5EF4-FFF2-40B4-BE49-F238E27FC236}">
-                <a16:creationId xmlns:a16="http://schemas.microsoft.com/office/drawing/2014/main" id="{BA1CCC8A-A16A-4FC8-BCD2-CD25F08C05F7}"/>
-              </a:ext>
-            </a:extLst>
-          </p:cNvPr>
-          <p:cNvGraphicFramePr>
-            <a:graphicFrameLocks noGrp="1"/>
-          </p:cNvGraphicFramePr>
-          <p:nvPr>
-            <p:extLst>
-              <p:ext uri="{D42A27DB-BD31-4B8C-83A1-F6EECF244321}">
-                <p14:modId xmlns:p14="http://schemas.microsoft.com/office/powerpoint/2010/main" val="4245398050"/>
-              </p:ext>
-            </p:extLst>
-          </p:nvPr>
-        </p:nvGraphicFramePr>
-        <p:xfrm>
-          <a:off x="1261872" y="2139730"/>
-          <a:ext cx="9315274" cy="2062450"/>
-        </p:xfrm>
-        <a:graphic>
-          <a:graphicData uri="http://schemas.openxmlformats.org/drawingml/2006/table">
-            <a:tbl>
-              <a:tblPr firstRow="1" bandRow="1">
-                <a:tableStyleId>{5C22544A-7EE6-4342-B048-85BDC9FD1C3A}</a:tableStyleId>
-              </a:tblPr>
-              <a:tblGrid>
-                <a:gridCol w="3845204">
-                  <a:extLst>
-                    <a:ext uri="{9D8B030D-6E8A-4147-A177-3AD203B41FA5}">
-                      <a16:colId xmlns:a16="http://schemas.microsoft.com/office/drawing/2014/main" val="3289297008"/>
-                    </a:ext>
-                  </a:extLst>
-                </a:gridCol>
-                <a:gridCol w="5470070">
-                  <a:extLst>
-                    <a:ext uri="{9D8B030D-6E8A-4147-A177-3AD203B41FA5}">
-                      <a16:colId xmlns:a16="http://schemas.microsoft.com/office/drawing/2014/main" val="3840985161"/>
-                    </a:ext>
-                  </a:extLst>
-                </a:gridCol>
-              </a:tblGrid>
-              <a:tr h="370840">
-                <a:tc>
-                  <a:txBody>
-                    <a:bodyPr/>
-                    <a:lstStyle/>
-                    <a:p>
-                      <a:pPr algn="ctr"/>
-                      <a:r>
-                        <a:rPr lang="en-AU" sz="1600" dirty="0"/>
-                        <a:t>Immediately</a:t>
-                      </a:r>
-                    </a:p>
-                  </a:txBody>
-                  <a:tcPr/>
-                </a:tc>
-                <a:tc>
-                  <a:txBody>
-                    <a:bodyPr/>
-                    <a:lstStyle/>
-                    <a:p>
-                      <a:pPr algn="ctr"/>
-                      <a:r>
-                        <a:rPr lang="en-AU" sz="1600" dirty="0"/>
-                        <a:t>On death of both of you</a:t>
-                      </a:r>
-                    </a:p>
-                  </a:txBody>
-                  <a:tcPr/>
-                </a:tc>
-                <a:extLst>
-                  <a:ext uri="{0D108BD9-81ED-4DB2-BD59-A6C34878D82A}">
-                    <a16:rowId xmlns:a16="http://schemas.microsoft.com/office/drawing/2014/main" val="41781513"/>
-                  </a:ext>
-                </a:extLst>
-              </a:tr>
-              <a:tr h="370840">
-                <a:tc>
-                  <a:txBody>
-                    <a:bodyPr/>
-                    <a:lstStyle/>
-                    <a:p>
-                      <a:pPr marL="0" lvl="0" indent="0" algn="ctr" rtl="0">
-                        <a:spcBef>
-                          <a:spcPts val="0"/>
-                        </a:spcBef>
-                        <a:spcAft>
-                          <a:spcPts val="0"/>
-                        </a:spcAft>
-                        <a:buNone/>
-                      </a:pPr>
-                      <a:r>
-                        <a:rPr lang="en-AU" sz="1400" b="0" dirty="0">
-                          <a:solidFill>
-                            <a:srgbClr val="272A35"/>
-                          </a:solidFill>
-                          <a:latin typeface="+mj-lt"/>
-                          <a:ea typeface="Tinos"/>
-                          <a:cs typeface="Tinos"/>
-                          <a:sym typeface="Tinos"/>
-                        </a:rPr>
-                        <a:t>Want spouse to utilise benefits of a testamentary trust</a:t>
-                      </a:r>
-                      <a:endParaRPr sz="1400" b="0" dirty="0">
-                        <a:solidFill>
-                          <a:srgbClr val="272A35"/>
-                        </a:solidFill>
-                        <a:latin typeface="+mj-lt"/>
-                        <a:ea typeface="Tinos"/>
-                        <a:cs typeface="Tinos"/>
-                        <a:sym typeface="Tinos"/>
-                      </a:endParaRPr>
-                    </a:p>
-                  </a:txBody>
-                  <a:tcPr marL="91425" marR="91425" marT="68575" marB="68575" anchor="ctr"/>
-                </a:tc>
-                <a:tc>
-                  <a:txBody>
-                    <a:bodyPr/>
-                    <a:lstStyle/>
-                    <a:p>
-                      <a:pPr marL="0" marR="0" lvl="0" indent="0" algn="ctr" defTabSz="342900" rtl="0" eaLnBrk="1" fontAlgn="auto" latinLnBrk="0" hangingPunct="1">
-                        <a:lnSpc>
-                          <a:spcPct val="100000"/>
-                        </a:lnSpc>
-                        <a:spcBef>
-                          <a:spcPts val="0"/>
-                        </a:spcBef>
-                        <a:spcAft>
-                          <a:spcPts val="0"/>
-                        </a:spcAft>
-                        <a:buClrTx/>
-                        <a:buSzTx/>
-                        <a:buFontTx/>
-                        <a:buNone/>
-                        <a:tabLst/>
-                        <a:defRPr/>
-                      </a:pPr>
-                      <a:r>
-                        <a:rPr lang="en-GB" sz="1400" b="0" kern="1200" dirty="0">
-                          <a:solidFill>
-                            <a:srgbClr val="272A35"/>
-                          </a:solidFill>
-                          <a:latin typeface="+mj-lt"/>
-                          <a:ea typeface="Tinos"/>
-                          <a:cs typeface="Tinos"/>
-                          <a:sym typeface="Tinos"/>
-                        </a:rPr>
-                        <a:t>Spouse has no need for any of the testamentary trust benefits</a:t>
-                      </a:r>
-                    </a:p>
-                  </a:txBody>
-                  <a:tcPr marL="91425" marR="91425" marT="68575" marB="68575" anchor="ctr"/>
-                </a:tc>
-                <a:extLst>
-                  <a:ext uri="{0D108BD9-81ED-4DB2-BD59-A6C34878D82A}">
-                    <a16:rowId xmlns:a16="http://schemas.microsoft.com/office/drawing/2014/main" val="306785138"/>
-                  </a:ext>
-                </a:extLst>
-              </a:tr>
-              <a:tr h="370840">
-                <a:tc>
-                  <a:txBody>
-                    <a:bodyPr/>
-                    <a:lstStyle/>
-                    <a:p>
-                      <a:pPr marL="0" lvl="0" indent="0" algn="ctr" rtl="0">
-                        <a:spcBef>
-                          <a:spcPts val="0"/>
-                        </a:spcBef>
-                        <a:spcAft>
-                          <a:spcPts val="0"/>
-                        </a:spcAft>
-                        <a:buNone/>
-                      </a:pPr>
-                      <a:r>
-                        <a:rPr lang="en-AU" sz="1400" b="0" dirty="0">
-                          <a:solidFill>
-                            <a:srgbClr val="272A35"/>
-                          </a:solidFill>
-                          <a:latin typeface="+mj-lt"/>
-                          <a:ea typeface="Tinos"/>
-                          <a:cs typeface="Tinos"/>
-                          <a:sym typeface="Tinos"/>
-                        </a:rPr>
-                        <a:t>Spouse will receive substantial assets under estate ($400,000+)</a:t>
-                      </a:r>
-                      <a:endParaRPr sz="1400" b="0" dirty="0">
-                        <a:solidFill>
-                          <a:srgbClr val="272A35"/>
-                        </a:solidFill>
-                        <a:latin typeface="+mj-lt"/>
-                        <a:ea typeface="Tinos"/>
-                        <a:cs typeface="Tinos"/>
-                        <a:sym typeface="Tinos"/>
-                      </a:endParaRPr>
-                    </a:p>
-                  </a:txBody>
-                  <a:tcPr marL="91425" marR="91425" marT="68575" marB="68575" anchor="ctr"/>
-                </a:tc>
-                <a:tc>
-                  <a:txBody>
-                    <a:bodyPr/>
-                    <a:lstStyle/>
-                    <a:p>
-                      <a:pPr marL="0" lvl="0" indent="0" algn="ctr" rtl="0">
-                        <a:spcBef>
-                          <a:spcPts val="0"/>
-                        </a:spcBef>
-                        <a:spcAft>
-                          <a:spcPts val="0"/>
-                        </a:spcAft>
-                        <a:buNone/>
-                      </a:pPr>
-                      <a:r>
-                        <a:rPr lang="en-GB" sz="1400" b="0" kern="1200" dirty="0">
-                          <a:solidFill>
-                            <a:srgbClr val="272A35"/>
-                          </a:solidFill>
-                          <a:latin typeface="+mj-lt"/>
-                          <a:ea typeface="Tinos"/>
-                          <a:cs typeface="Tinos"/>
-                          <a:sym typeface="Tinos"/>
-                        </a:rPr>
-                        <a:t>Lack of assets will form part of your estate</a:t>
-                      </a:r>
-                    </a:p>
-                  </a:txBody>
-                  <a:tcPr marL="91425" marR="91425" marT="68575" marB="68575" anchor="ctr"/>
-                </a:tc>
-                <a:extLst>
-                  <a:ext uri="{0D108BD9-81ED-4DB2-BD59-A6C34878D82A}">
-                    <a16:rowId xmlns:a16="http://schemas.microsoft.com/office/drawing/2014/main" val="999296499"/>
-                  </a:ext>
-                </a:extLst>
-              </a:tr>
-              <a:tr h="370840">
-                <a:tc>
-                  <a:txBody>
-                    <a:bodyPr/>
-                    <a:lstStyle/>
-                    <a:p>
-                      <a:pPr marL="0" lvl="0" indent="0" algn="ctr" rtl="0">
-                        <a:spcBef>
-                          <a:spcPts val="0"/>
-                        </a:spcBef>
-                        <a:spcAft>
-                          <a:spcPts val="0"/>
-                        </a:spcAft>
-                        <a:buNone/>
-                      </a:pPr>
-                      <a:r>
-                        <a:rPr lang="en-AU" sz="1400" b="0" dirty="0">
-                          <a:solidFill>
-                            <a:srgbClr val="272A35"/>
-                          </a:solidFill>
-                          <a:latin typeface="+mj-lt"/>
-                          <a:ea typeface="Tinos"/>
-                          <a:cs typeface="Tinos"/>
-                          <a:sym typeface="Tinos"/>
-                        </a:rPr>
-                        <a:t>Useful if there are minors able to benefit</a:t>
-                      </a:r>
-                      <a:endParaRPr sz="1400" b="0" dirty="0">
-                        <a:solidFill>
-                          <a:srgbClr val="272A35"/>
-                        </a:solidFill>
-                        <a:latin typeface="+mj-lt"/>
-                        <a:ea typeface="Tinos"/>
-                        <a:cs typeface="Tinos"/>
-                        <a:sym typeface="Tinos"/>
-                      </a:endParaRPr>
-                    </a:p>
-                  </a:txBody>
-                  <a:tcPr marL="91425" marR="91425" marT="68575" marB="68575" anchor="ctr"/>
-                </a:tc>
-                <a:tc>
-                  <a:txBody>
-                    <a:bodyPr/>
-                    <a:lstStyle/>
-                    <a:p>
-                      <a:pPr marL="0" lvl="0" indent="0" algn="ctr" rtl="0">
-                        <a:spcBef>
-                          <a:spcPts val="0"/>
-                        </a:spcBef>
-                        <a:spcAft>
-                          <a:spcPts val="0"/>
-                        </a:spcAft>
-                        <a:buNone/>
-                      </a:pPr>
-                      <a:r>
-                        <a:rPr lang="en-AU" sz="1400" b="0" dirty="0">
-                          <a:solidFill>
-                            <a:srgbClr val="272A35"/>
-                          </a:solidFill>
-                          <a:latin typeface="+mj-lt"/>
-                          <a:ea typeface="Tinos"/>
-                          <a:cs typeface="Tinos"/>
-                          <a:sym typeface="Tinos"/>
-                        </a:rPr>
-                        <a:t>No minors around and no need to have ability to distribute to adult children</a:t>
-                      </a:r>
-                      <a:endParaRPr sz="1400" b="0" dirty="0">
-                        <a:solidFill>
-                          <a:srgbClr val="272A35"/>
-                        </a:solidFill>
-                        <a:latin typeface="+mj-lt"/>
-                        <a:ea typeface="Tinos"/>
-                        <a:cs typeface="Tinos"/>
-                        <a:sym typeface="Tinos"/>
-                      </a:endParaRPr>
-                    </a:p>
-                  </a:txBody>
-                  <a:tcPr marL="91425" marR="91425" marT="68575" marB="68575" anchor="ctr"/>
-                </a:tc>
-                <a:extLst>
-                  <a:ext uri="{0D108BD9-81ED-4DB2-BD59-A6C34878D82A}">
-                    <a16:rowId xmlns:a16="http://schemas.microsoft.com/office/drawing/2014/main" val="3171553806"/>
-                  </a:ext>
-                </a:extLst>
-              </a:tr>
-            </a:tbl>
-          </a:graphicData>
-        </a:graphic>
-      </p:graphicFrame>
+              <a:t>Testamentary trusts</a:t>
+            </a:r>
+          </a:p>
+        </p:txBody>
+      </p:sp>
     </p:spTree>
     <p:extLst>
       <p:ext uri="{BB962C8B-B14F-4D97-AF65-F5344CB8AC3E}">
-        <p14:creationId xmlns:p14="http://schemas.microsoft.com/office/powerpoint/2010/main" val="2406923151"/>
+        <p14:creationId xmlns:p14="http://schemas.microsoft.com/office/powerpoint/2010/main" val="3922821135"/>
       </p:ext>
     </p:extLst>
   </p:cSld>
